--- a/report-generator/tests/report_generator/integration/references/reference_objectives.pptx
+++ b/report-generator/tests/report_generator/integration/references/reference_objectives.pptx
@@ -290,7 +290,7 @@
                 <c:formatCode>General</c:formatCode>
                 <c:ptCount val="1"/>
                 <c:pt idx="0">
-                  <c:v>0.0</c:v>
+                  <c:v>0</c:v>
                 </c:pt>
               </c:numCache>
             </c:numRef>
@@ -343,7 +343,7 @@
                 <c:formatCode>General</c:formatCode>
                 <c:ptCount val="1"/>
                 <c:pt idx="0">
-                  <c:v>43.24324324324324</c:v>
+                  <c:v>43.243243243243242</c:v>
                 </c:pt>
               </c:numCache>
             </c:numRef>
@@ -396,7 +396,7 @@
                 <c:formatCode>General</c:formatCode>
                 <c:ptCount val="1"/>
                 <c:pt idx="0">
-                  <c:v>5.405405405405405</c:v>
+                  <c:v>5.4054054054054053</c:v>
                 </c:pt>
               </c:numCache>
             </c:numRef>
@@ -738,7 +738,7 @@
                 <c:formatCode>General</c:formatCode>
                 <c:ptCount val="1"/>
                 <c:pt idx="0">
-                  <c:v>0.0</c:v>
+                  <c:v>0</c:v>
                 </c:pt>
               </c:numCache>
             </c:numRef>
@@ -791,7 +791,7 @@
                 <c:formatCode>General</c:formatCode>
                 <c:ptCount val="1"/>
                 <c:pt idx="0">
-                  <c:v>43.24324324324324</c:v>
+                  <c:v>43.243243243243242</c:v>
                 </c:pt>
               </c:numCache>
             </c:numRef>
@@ -844,7 +844,7 @@
                 <c:formatCode>General</c:formatCode>
                 <c:ptCount val="1"/>
                 <c:pt idx="0">
-                  <c:v>5.405405405405405</c:v>
+                  <c:v>5.4054054054054053</c:v>
                 </c:pt>
               </c:numCache>
             </c:numRef>
@@ -1172,10 +1172,10 @@
                 <c:formatCode>General</c:formatCode>
                 <c:ptCount val="4"/>
                 <c:pt idx="0">
-                  <c:v>66.66666666666667</c:v>
+                  <c:v>66.666666666666671</c:v>
                 </c:pt>
                 <c:pt idx="1">
-                  <c:v>46.15384615384615</c:v>
+                  <c:v>46.153846153846153</c:v>
                 </c:pt>
                 <c:pt idx="2">
                   <c:v>33.333333333333336</c:v>
@@ -1243,13 +1243,13 @@
                 <c:formatCode>General</c:formatCode>
                 <c:ptCount val="4"/>
                 <c:pt idx="0">
-                  <c:v>0.0</c:v>
+                  <c:v>0</c:v>
                 </c:pt>
                 <c:pt idx="1">
-                  <c:v>0.0</c:v>
+                  <c:v>0</c:v>
                 </c:pt>
                 <c:pt idx="2">
-                  <c:v>0.0</c:v>
+                  <c:v>0</c:v>
                 </c:pt>
                 <c:pt idx="3">
                   <c:v>0</c:v>
@@ -1317,10 +1317,10 @@
                   <c:v>16.666666666666668</c:v>
                 </c:pt>
                 <c:pt idx="1">
-                  <c:v>46.15384615384615</c:v>
+                  <c:v>46.153846153846153</c:v>
                 </c:pt>
                 <c:pt idx="2">
-                  <c:v>66.66666666666667</c:v>
+                  <c:v>66.666666666666671</c:v>
                 </c:pt>
                 <c:pt idx="3">
                   <c:v>0</c:v>
@@ -1385,13 +1385,13 @@
                 <c:formatCode>General</c:formatCode>
                 <c:ptCount val="4"/>
                 <c:pt idx="0">
-                  <c:v>8.333333333333334</c:v>
+                  <c:v>8.3333333333333339</c:v>
                 </c:pt>
                 <c:pt idx="1">
                   <c:v>7.6923076923076925</c:v>
                 </c:pt>
                 <c:pt idx="2">
-                  <c:v>0.0</c:v>
+                  <c:v>0</c:v>
                 </c:pt>
                 <c:pt idx="3">
                   <c:v>0</c:v>
@@ -1458,13 +1458,13 @@
                 <c:formatCode>General</c:formatCode>
                 <c:ptCount val="4"/>
                 <c:pt idx="0">
-                  <c:v>8.333333333333334</c:v>
+                  <c:v>8.3333333333333339</c:v>
                 </c:pt>
                 <c:pt idx="1">
-                  <c:v>0.0</c:v>
+                  <c:v>0</c:v>
                 </c:pt>
                 <c:pt idx="2">
-                  <c:v>0.0</c:v>
+                  <c:v>0</c:v>
                 </c:pt>
                 <c:pt idx="3">
                   <c:v>0</c:v>
@@ -1764,25 +1764,25 @@
                 <c:formatCode>General</c:formatCode>
                 <c:ptCount val="12"/>
                 <c:pt idx="0">
-                  <c:v>0.0</c:v>
+                  <c:v>0</c:v>
                 </c:pt>
                 <c:pt idx="1">
-                  <c:v>0.0</c:v>
+                  <c:v>0</c:v>
                 </c:pt>
                 <c:pt idx="2">
-                  <c:v>0.0</c:v>
+                  <c:v>0</c:v>
                 </c:pt>
                 <c:pt idx="3">
-                  <c:v>0.0</c:v>
+                  <c:v>0</c:v>
                 </c:pt>
                 <c:pt idx="4">
-                  <c:v>0.0</c:v>
+                  <c:v>0</c:v>
                 </c:pt>
                 <c:pt idx="5">
-                  <c:v>0.0</c:v>
+                  <c:v>0</c:v>
                 </c:pt>
                 <c:pt idx="6">
-                  <c:v>0.0</c:v>
+                  <c:v>0</c:v>
                 </c:pt>
                 <c:pt idx="7">
                   <c:v>2.7027027027027026</c:v>
@@ -1883,40 +1883,40 @@
                 <c:formatCode>General</c:formatCode>
                 <c:ptCount val="12"/>
                 <c:pt idx="0">
-                  <c:v>0.0</c:v>
+                  <c:v>0</c:v>
                 </c:pt>
                 <c:pt idx="1">
-                  <c:v>0.0</c:v>
+                  <c:v>0</c:v>
                 </c:pt>
                 <c:pt idx="2">
-                  <c:v>0.0</c:v>
+                  <c:v>0</c:v>
                 </c:pt>
                 <c:pt idx="3">
-                  <c:v>0.0</c:v>
+                  <c:v>0</c:v>
                 </c:pt>
                 <c:pt idx="4">
-                  <c:v>0.0</c:v>
+                  <c:v>0</c:v>
                 </c:pt>
                 <c:pt idx="5">
-                  <c:v>0.0</c:v>
+                  <c:v>0</c:v>
                 </c:pt>
                 <c:pt idx="6">
-                  <c:v>0.0</c:v>
+                  <c:v>0</c:v>
                 </c:pt>
                 <c:pt idx="7">
-                  <c:v>0.0</c:v>
+                  <c:v>0</c:v>
                 </c:pt>
                 <c:pt idx="8">
-                  <c:v>0.0</c:v>
+                  <c:v>0</c:v>
                 </c:pt>
                 <c:pt idx="9">
-                  <c:v>0.0</c:v>
+                  <c:v>0</c:v>
                 </c:pt>
                 <c:pt idx="10">
-                  <c:v>0.0</c:v>
+                  <c:v>0</c:v>
                 </c:pt>
                 <c:pt idx="11">
-                  <c:v>5.405405405405405</c:v>
+                  <c:v>5.4054054054054053</c:v>
                 </c:pt>
               </c:numCache>
             </c:numRef>
@@ -2002,25 +2002,25 @@
                 <c:formatCode>General</c:formatCode>
                 <c:ptCount val="12"/>
                 <c:pt idx="0">
-                  <c:v>0.0</c:v>
+                  <c:v>0</c:v>
                 </c:pt>
                 <c:pt idx="1">
-                  <c:v>0.0</c:v>
+                  <c:v>0</c:v>
                 </c:pt>
                 <c:pt idx="2">
-                  <c:v>0.0</c:v>
+                  <c:v>0</c:v>
                 </c:pt>
                 <c:pt idx="3">
-                  <c:v>0.0</c:v>
+                  <c:v>0</c:v>
                 </c:pt>
                 <c:pt idx="4">
-                  <c:v>0.0</c:v>
+                  <c:v>0</c:v>
                 </c:pt>
                 <c:pt idx="5">
-                  <c:v>0.0</c:v>
+                  <c:v>0</c:v>
                 </c:pt>
                 <c:pt idx="6">
-                  <c:v>0.0</c:v>
+                  <c:v>0</c:v>
                 </c:pt>
                 <c:pt idx="7">
                   <c:v>2.7027027027027026</c:v>
@@ -2121,31 +2121,31 @@
                 <c:formatCode>General</c:formatCode>
                 <c:ptCount val="12"/>
                 <c:pt idx="0">
-                  <c:v>0.0</c:v>
+                  <c:v>0</c:v>
                 </c:pt>
                 <c:pt idx="1">
-                  <c:v>0.0</c:v>
+                  <c:v>0</c:v>
                 </c:pt>
                 <c:pt idx="2">
-                  <c:v>0.0</c:v>
+                  <c:v>0</c:v>
                 </c:pt>
                 <c:pt idx="3">
-                  <c:v>0.0</c:v>
+                  <c:v>0</c:v>
                 </c:pt>
                 <c:pt idx="4">
-                  <c:v>0.0</c:v>
+                  <c:v>0</c:v>
                 </c:pt>
                 <c:pt idx="5">
-                  <c:v>0.0</c:v>
+                  <c:v>0</c:v>
                 </c:pt>
                 <c:pt idx="6">
-                  <c:v>0.0</c:v>
+                  <c:v>0</c:v>
                 </c:pt>
                 <c:pt idx="7">
-                  <c:v>0.0</c:v>
+                  <c:v>0</c:v>
                 </c:pt>
                 <c:pt idx="8">
-                  <c:v>0.0</c:v>
+                  <c:v>0</c:v>
                 </c:pt>
                 <c:pt idx="9">
                   <c:v>2.7027027027027026</c:v>
@@ -2154,7 +2154,7 @@
                   <c:v>2.7027027027027026</c:v>
                 </c:pt>
                 <c:pt idx="11">
-                  <c:v>0.0</c:v>
+                  <c:v>0</c:v>
                 </c:pt>
               </c:numCache>
             </c:numRef>
@@ -2242,31 +2242,31 @@
                 <c:formatCode>General</c:formatCode>
                 <c:ptCount val="12"/>
                 <c:pt idx="0">
-                  <c:v>100.0</c:v>
+                  <c:v>100</c:v>
                 </c:pt>
                 <c:pt idx="1">
-                  <c:v>100.0</c:v>
+                  <c:v>100</c:v>
                 </c:pt>
                 <c:pt idx="2">
-                  <c:v>100.0</c:v>
+                  <c:v>100</c:v>
                 </c:pt>
                 <c:pt idx="3">
-                  <c:v>100.0</c:v>
+                  <c:v>100</c:v>
                 </c:pt>
                 <c:pt idx="4">
-                  <c:v>100.0</c:v>
+                  <c:v>100</c:v>
                 </c:pt>
                 <c:pt idx="5">
-                  <c:v>100.0</c:v>
+                  <c:v>100</c:v>
                 </c:pt>
                 <c:pt idx="6">
-                  <c:v>100.0</c:v>
+                  <c:v>100</c:v>
                 </c:pt>
                 <c:pt idx="7">
-                  <c:v>94.5945945945946</c:v>
+                  <c:v>94.594594594594597</c:v>
                 </c:pt>
                 <c:pt idx="8">
-                  <c:v>94.5945945945946</c:v>
+                  <c:v>94.594594594594597</c:v>
                 </c:pt>
                 <c:pt idx="9">
                   <c:v>24.324324324324323</c:v>
@@ -3380,31 +3380,31 @@
                 <c:formatCode>General</c:formatCode>
                 <c:ptCount val="12"/>
                 <c:pt idx="0">
-                  <c:v>0.0</c:v>
+                  <c:v>0</c:v>
                 </c:pt>
                 <c:pt idx="1">
-                  <c:v>0.0</c:v>
+                  <c:v>0</c:v>
                 </c:pt>
                 <c:pt idx="2">
-                  <c:v>0.0</c:v>
+                  <c:v>0</c:v>
                 </c:pt>
                 <c:pt idx="3">
-                  <c:v>0.0</c:v>
+                  <c:v>0</c:v>
                 </c:pt>
                 <c:pt idx="4">
-                  <c:v>0.0</c:v>
+                  <c:v>0</c:v>
                 </c:pt>
                 <c:pt idx="5">
-                  <c:v>0.0</c:v>
+                  <c:v>0</c:v>
                 </c:pt>
                 <c:pt idx="6">
-                  <c:v>0.0</c:v>
+                  <c:v>0</c:v>
                 </c:pt>
                 <c:pt idx="7">
-                  <c:v>8.333333333333334</c:v>
+                  <c:v>8.3333333333333339</c:v>
                 </c:pt>
                 <c:pt idx="8">
-                  <c:v>8.333333333333334</c:v>
+                  <c:v>8.3333333333333339</c:v>
                 </c:pt>
                 <c:pt idx="9">
                   <c:v>33.333333333333336</c:v>
@@ -3499,40 +3499,40 @@
                 <c:formatCode>General</c:formatCode>
                 <c:ptCount val="12"/>
                 <c:pt idx="0">
-                  <c:v>0.0</c:v>
+                  <c:v>0</c:v>
                 </c:pt>
                 <c:pt idx="1">
-                  <c:v>0.0</c:v>
+                  <c:v>0</c:v>
                 </c:pt>
                 <c:pt idx="2">
-                  <c:v>0.0</c:v>
+                  <c:v>0</c:v>
                 </c:pt>
                 <c:pt idx="3">
-                  <c:v>0.0</c:v>
+                  <c:v>0</c:v>
                 </c:pt>
                 <c:pt idx="4">
-                  <c:v>0.0</c:v>
+                  <c:v>0</c:v>
                 </c:pt>
                 <c:pt idx="5">
-                  <c:v>0.0</c:v>
+                  <c:v>0</c:v>
                 </c:pt>
                 <c:pt idx="6">
-                  <c:v>0.0</c:v>
+                  <c:v>0</c:v>
                 </c:pt>
                 <c:pt idx="7">
-                  <c:v>0.0</c:v>
+                  <c:v>0</c:v>
                 </c:pt>
                 <c:pt idx="8">
-                  <c:v>0.0</c:v>
+                  <c:v>0</c:v>
                 </c:pt>
                 <c:pt idx="9">
-                  <c:v>0.0</c:v>
+                  <c:v>0</c:v>
                 </c:pt>
                 <c:pt idx="10">
-                  <c:v>0.0</c:v>
+                  <c:v>0</c:v>
                 </c:pt>
                 <c:pt idx="11">
-                  <c:v>8.333333333333334</c:v>
+                  <c:v>8.3333333333333339</c:v>
                 </c:pt>
               </c:numCache>
             </c:numRef>
@@ -3618,40 +3618,40 @@
                 <c:formatCode>General</c:formatCode>
                 <c:ptCount val="12"/>
                 <c:pt idx="0">
-                  <c:v>0.0</c:v>
+                  <c:v>0</c:v>
                 </c:pt>
                 <c:pt idx="1">
-                  <c:v>0.0</c:v>
+                  <c:v>0</c:v>
                 </c:pt>
                 <c:pt idx="2">
-                  <c:v>0.0</c:v>
+                  <c:v>0</c:v>
                 </c:pt>
                 <c:pt idx="3">
-                  <c:v>0.0</c:v>
+                  <c:v>0</c:v>
                 </c:pt>
                 <c:pt idx="4">
-                  <c:v>0.0</c:v>
+                  <c:v>0</c:v>
                 </c:pt>
                 <c:pt idx="5">
-                  <c:v>0.0</c:v>
+                  <c:v>0</c:v>
                 </c:pt>
                 <c:pt idx="6">
-                  <c:v>0.0</c:v>
+                  <c:v>0</c:v>
                 </c:pt>
                 <c:pt idx="7">
-                  <c:v>0.0</c:v>
+                  <c:v>0</c:v>
                 </c:pt>
                 <c:pt idx="8">
-                  <c:v>0.0</c:v>
+                  <c:v>0</c:v>
                 </c:pt>
                 <c:pt idx="9">
-                  <c:v>0.0</c:v>
+                  <c:v>0</c:v>
                 </c:pt>
                 <c:pt idx="10">
-                  <c:v>66.66666666666667</c:v>
+                  <c:v>66.666666666666671</c:v>
                 </c:pt>
                 <c:pt idx="11">
-                  <c:v>50.0</c:v>
+                  <c:v>50</c:v>
                 </c:pt>
               </c:numCache>
             </c:numRef>
@@ -3737,40 +3737,40 @@
                 <c:formatCode>General</c:formatCode>
                 <c:ptCount val="12"/>
                 <c:pt idx="0">
-                  <c:v>0.0</c:v>
+                  <c:v>0</c:v>
                 </c:pt>
                 <c:pt idx="1">
-                  <c:v>0.0</c:v>
+                  <c:v>0</c:v>
                 </c:pt>
                 <c:pt idx="2">
-                  <c:v>0.0</c:v>
+                  <c:v>0</c:v>
                 </c:pt>
                 <c:pt idx="3">
-                  <c:v>0.0</c:v>
+                  <c:v>0</c:v>
                 </c:pt>
                 <c:pt idx="4">
-                  <c:v>0.0</c:v>
+                  <c:v>0</c:v>
                 </c:pt>
                 <c:pt idx="5">
-                  <c:v>0.0</c:v>
+                  <c:v>0</c:v>
                 </c:pt>
                 <c:pt idx="6">
-                  <c:v>0.0</c:v>
+                  <c:v>0</c:v>
                 </c:pt>
                 <c:pt idx="7">
-                  <c:v>0.0</c:v>
+                  <c:v>0</c:v>
                 </c:pt>
                 <c:pt idx="8">
-                  <c:v>0.0</c:v>
+                  <c:v>0</c:v>
                 </c:pt>
                 <c:pt idx="9">
-                  <c:v>0.0</c:v>
+                  <c:v>0</c:v>
                 </c:pt>
                 <c:pt idx="10">
-                  <c:v>0.0</c:v>
+                  <c:v>0</c:v>
                 </c:pt>
                 <c:pt idx="11">
-                  <c:v>0.0</c:v>
+                  <c:v>0</c:v>
                 </c:pt>
               </c:numCache>
             </c:numRef>
@@ -3858,40 +3858,40 @@
                 <c:formatCode>General</c:formatCode>
                 <c:ptCount val="12"/>
                 <c:pt idx="0">
-                  <c:v>100.0</c:v>
+                  <c:v>100</c:v>
                 </c:pt>
                 <c:pt idx="1">
-                  <c:v>100.0</c:v>
+                  <c:v>100</c:v>
                 </c:pt>
                 <c:pt idx="2">
-                  <c:v>100.0</c:v>
+                  <c:v>100</c:v>
                 </c:pt>
                 <c:pt idx="3">
-                  <c:v>100.0</c:v>
+                  <c:v>100</c:v>
                 </c:pt>
                 <c:pt idx="4">
-                  <c:v>100.0</c:v>
+                  <c:v>100</c:v>
                 </c:pt>
                 <c:pt idx="5">
-                  <c:v>100.0</c:v>
+                  <c:v>100</c:v>
                 </c:pt>
                 <c:pt idx="6">
-                  <c:v>100.0</c:v>
+                  <c:v>100</c:v>
                 </c:pt>
                 <c:pt idx="7">
-                  <c:v>91.66666666666667</c:v>
+                  <c:v>91.666666666666671</c:v>
                 </c:pt>
                 <c:pt idx="8">
-                  <c:v>91.66666666666667</c:v>
+                  <c:v>91.666666666666671</c:v>
                 </c:pt>
                 <c:pt idx="9">
-                  <c:v>66.66666666666667</c:v>
+                  <c:v>66.666666666666671</c:v>
                 </c:pt>
                 <c:pt idx="10">
-                  <c:v>0.0</c:v>
+                  <c:v>0</c:v>
                 </c:pt>
                 <c:pt idx="11">
-                  <c:v>0.0</c:v>
+                  <c:v>0</c:v>
                 </c:pt>
               </c:numCache>
             </c:numRef>
@@ -4188,40 +4188,40 @@
                 <c:formatCode>General</c:formatCode>
                 <c:ptCount val="12"/>
                 <c:pt idx="0">
-                  <c:v>0.0</c:v>
+                  <c:v>0</c:v>
                 </c:pt>
                 <c:pt idx="1">
-                  <c:v>0.0</c:v>
+                  <c:v>0</c:v>
                 </c:pt>
                 <c:pt idx="2">
-                  <c:v>0.0</c:v>
+                  <c:v>0</c:v>
                 </c:pt>
                 <c:pt idx="3">
-                  <c:v>0.0</c:v>
+                  <c:v>0</c:v>
                 </c:pt>
                 <c:pt idx="4">
-                  <c:v>0.0</c:v>
+                  <c:v>0</c:v>
                 </c:pt>
                 <c:pt idx="5">
-                  <c:v>0.0</c:v>
+                  <c:v>0</c:v>
                 </c:pt>
                 <c:pt idx="6">
-                  <c:v>0.0</c:v>
+                  <c:v>0</c:v>
                 </c:pt>
                 <c:pt idx="7">
-                  <c:v>0.0</c:v>
+                  <c:v>0</c:v>
                 </c:pt>
                 <c:pt idx="8">
-                  <c:v>0.0</c:v>
+                  <c:v>0</c:v>
                 </c:pt>
                 <c:pt idx="9">
-                  <c:v>46.15384615384615</c:v>
+                  <c:v>46.153846153846153</c:v>
                 </c:pt>
                 <c:pt idx="10">
-                  <c:v>46.15384615384615</c:v>
+                  <c:v>46.153846153846153</c:v>
                 </c:pt>
                 <c:pt idx="11">
-                  <c:v>46.15384615384615</c:v>
+                  <c:v>46.153846153846153</c:v>
                 </c:pt>
               </c:numCache>
             </c:numRef>
@@ -4307,40 +4307,40 @@
                 <c:formatCode>General</c:formatCode>
                 <c:ptCount val="12"/>
                 <c:pt idx="0">
-                  <c:v>0.0</c:v>
+                  <c:v>0</c:v>
                 </c:pt>
                 <c:pt idx="1">
-                  <c:v>0.0</c:v>
+                  <c:v>0</c:v>
                 </c:pt>
                 <c:pt idx="2">
-                  <c:v>0.0</c:v>
+                  <c:v>0</c:v>
                 </c:pt>
                 <c:pt idx="3">
-                  <c:v>0.0</c:v>
+                  <c:v>0</c:v>
                 </c:pt>
                 <c:pt idx="4">
-                  <c:v>0.0</c:v>
+                  <c:v>0</c:v>
                 </c:pt>
                 <c:pt idx="5">
-                  <c:v>0.0</c:v>
+                  <c:v>0</c:v>
                 </c:pt>
                 <c:pt idx="6">
-                  <c:v>0.0</c:v>
+                  <c:v>0</c:v>
                 </c:pt>
                 <c:pt idx="7">
-                  <c:v>0.0</c:v>
+                  <c:v>0</c:v>
                 </c:pt>
                 <c:pt idx="8">
-                  <c:v>0.0</c:v>
+                  <c:v>0</c:v>
                 </c:pt>
                 <c:pt idx="9">
-                  <c:v>0.0</c:v>
+                  <c:v>0</c:v>
                 </c:pt>
                 <c:pt idx="10">
-                  <c:v>0.0</c:v>
+                  <c:v>0</c:v>
                 </c:pt>
                 <c:pt idx="11">
-                  <c:v>0.0</c:v>
+                  <c:v>0</c:v>
                 </c:pt>
               </c:numCache>
             </c:numRef>
@@ -4426,25 +4426,25 @@
                 <c:formatCode>General</c:formatCode>
                 <c:ptCount val="12"/>
                 <c:pt idx="0">
-                  <c:v>0.0</c:v>
+                  <c:v>0</c:v>
                 </c:pt>
                 <c:pt idx="1">
-                  <c:v>0.0</c:v>
+                  <c:v>0</c:v>
                 </c:pt>
                 <c:pt idx="2">
-                  <c:v>0.0</c:v>
+                  <c:v>0</c:v>
                 </c:pt>
                 <c:pt idx="3">
-                  <c:v>0.0</c:v>
+                  <c:v>0</c:v>
                 </c:pt>
                 <c:pt idx="4">
-                  <c:v>0.0</c:v>
+                  <c:v>0</c:v>
                 </c:pt>
                 <c:pt idx="5">
-                  <c:v>0.0</c:v>
+                  <c:v>0</c:v>
                 </c:pt>
                 <c:pt idx="6">
-                  <c:v>0.0</c:v>
+                  <c:v>0</c:v>
                 </c:pt>
                 <c:pt idx="7">
                   <c:v>7.6923076923076925</c:v>
@@ -4453,13 +4453,13 @@
                   <c:v>7.6923076923076925</c:v>
                 </c:pt>
                 <c:pt idx="9">
-                  <c:v>46.15384615384615</c:v>
+                  <c:v>46.153846153846153</c:v>
                 </c:pt>
                 <c:pt idx="10">
-                  <c:v>53.84615384615385</c:v>
+                  <c:v>53.846153846153847</c:v>
                 </c:pt>
                 <c:pt idx="11">
-                  <c:v>53.84615384615385</c:v>
+                  <c:v>53.846153846153847</c:v>
                 </c:pt>
               </c:numCache>
             </c:numRef>
@@ -4545,40 +4545,40 @@
                 <c:formatCode>General</c:formatCode>
                 <c:ptCount val="12"/>
                 <c:pt idx="0">
-                  <c:v>0.0</c:v>
+                  <c:v>0</c:v>
                 </c:pt>
                 <c:pt idx="1">
-                  <c:v>0.0</c:v>
+                  <c:v>0</c:v>
                 </c:pt>
                 <c:pt idx="2">
-                  <c:v>0.0</c:v>
+                  <c:v>0</c:v>
                 </c:pt>
                 <c:pt idx="3">
-                  <c:v>0.0</c:v>
+                  <c:v>0</c:v>
                 </c:pt>
                 <c:pt idx="4">
-                  <c:v>0.0</c:v>
+                  <c:v>0</c:v>
                 </c:pt>
                 <c:pt idx="5">
-                  <c:v>0.0</c:v>
+                  <c:v>0</c:v>
                 </c:pt>
                 <c:pt idx="6">
-                  <c:v>0.0</c:v>
+                  <c:v>0</c:v>
                 </c:pt>
                 <c:pt idx="7">
-                  <c:v>0.0</c:v>
+                  <c:v>0</c:v>
                 </c:pt>
                 <c:pt idx="8">
-                  <c:v>0.0</c:v>
+                  <c:v>0</c:v>
                 </c:pt>
                 <c:pt idx="9">
                   <c:v>7.6923076923076925</c:v>
                 </c:pt>
                 <c:pt idx="10">
-                  <c:v>0.0</c:v>
+                  <c:v>0</c:v>
                 </c:pt>
                 <c:pt idx="11">
-                  <c:v>0.0</c:v>
+                  <c:v>0</c:v>
                 </c:pt>
               </c:numCache>
             </c:numRef>
@@ -4666,40 +4666,40 @@
                 <c:formatCode>General</c:formatCode>
                 <c:ptCount val="12"/>
                 <c:pt idx="0">
-                  <c:v>100.0</c:v>
+                  <c:v>100</c:v>
                 </c:pt>
                 <c:pt idx="1">
-                  <c:v>100.0</c:v>
+                  <c:v>100</c:v>
                 </c:pt>
                 <c:pt idx="2">
-                  <c:v>100.0</c:v>
+                  <c:v>100</c:v>
                 </c:pt>
                 <c:pt idx="3">
-                  <c:v>100.0</c:v>
+                  <c:v>100</c:v>
                 </c:pt>
                 <c:pt idx="4">
-                  <c:v>100.0</c:v>
+                  <c:v>100</c:v>
                 </c:pt>
                 <c:pt idx="5">
-                  <c:v>100.0</c:v>
+                  <c:v>100</c:v>
                 </c:pt>
                 <c:pt idx="6">
-                  <c:v>100.0</c:v>
+                  <c:v>100</c:v>
                 </c:pt>
                 <c:pt idx="7">
-                  <c:v>92.3076923076923</c:v>
+                  <c:v>92.307692307692307</c:v>
                 </c:pt>
                 <c:pt idx="8">
-                  <c:v>92.3076923076923</c:v>
+                  <c:v>92.307692307692307</c:v>
                 </c:pt>
                 <c:pt idx="9">
-                  <c:v>0.0</c:v>
+                  <c:v>0</c:v>
                 </c:pt>
                 <c:pt idx="10">
-                  <c:v>0.0</c:v>
+                  <c:v>0</c:v>
                 </c:pt>
                 <c:pt idx="11">
-                  <c:v>0.0</c:v>
+                  <c:v>0</c:v>
                 </c:pt>
               </c:numCache>
             </c:numRef>
@@ -4996,40 +4996,40 @@
                 <c:formatCode>General</c:formatCode>
                 <c:ptCount val="12"/>
                 <c:pt idx="0">
-                  <c:v>0.0</c:v>
+                  <c:v>0</c:v>
                 </c:pt>
                 <c:pt idx="1">
-                  <c:v>0.0</c:v>
+                  <c:v>0</c:v>
                 </c:pt>
                 <c:pt idx="2">
-                  <c:v>0.0</c:v>
+                  <c:v>0</c:v>
                 </c:pt>
                 <c:pt idx="3">
-                  <c:v>0.0</c:v>
+                  <c:v>0</c:v>
                 </c:pt>
                 <c:pt idx="4">
-                  <c:v>0.0</c:v>
+                  <c:v>0</c:v>
                 </c:pt>
                 <c:pt idx="5">
-                  <c:v>0.0</c:v>
+                  <c:v>0</c:v>
                 </c:pt>
                 <c:pt idx="6">
-                  <c:v>0.0</c:v>
+                  <c:v>0</c:v>
                 </c:pt>
                 <c:pt idx="7">
-                  <c:v>0.0</c:v>
+                  <c:v>0</c:v>
                 </c:pt>
                 <c:pt idx="8">
-                  <c:v>0.0</c:v>
+                  <c:v>0</c:v>
                 </c:pt>
                 <c:pt idx="9">
-                  <c:v>66.66666666666667</c:v>
+                  <c:v>66.666666666666671</c:v>
                 </c:pt>
                 <c:pt idx="10">
-                  <c:v>66.66666666666667</c:v>
+                  <c:v>66.666666666666671</c:v>
                 </c:pt>
                 <c:pt idx="11">
-                  <c:v>66.66666666666667</c:v>
+                  <c:v>66.666666666666671</c:v>
                 </c:pt>
               </c:numCache>
             </c:numRef>
@@ -5115,40 +5115,40 @@
                 <c:formatCode>General</c:formatCode>
                 <c:ptCount val="12"/>
                 <c:pt idx="0">
-                  <c:v>0.0</c:v>
+                  <c:v>0</c:v>
                 </c:pt>
                 <c:pt idx="1">
-                  <c:v>0.0</c:v>
+                  <c:v>0</c:v>
                 </c:pt>
                 <c:pt idx="2">
-                  <c:v>0.0</c:v>
+                  <c:v>0</c:v>
                 </c:pt>
                 <c:pt idx="3">
-                  <c:v>0.0</c:v>
+                  <c:v>0</c:v>
                 </c:pt>
                 <c:pt idx="4">
-                  <c:v>0.0</c:v>
+                  <c:v>0</c:v>
                 </c:pt>
                 <c:pt idx="5">
-                  <c:v>0.0</c:v>
+                  <c:v>0</c:v>
                 </c:pt>
                 <c:pt idx="6">
-                  <c:v>0.0</c:v>
+                  <c:v>0</c:v>
                 </c:pt>
                 <c:pt idx="7">
-                  <c:v>0.0</c:v>
+                  <c:v>0</c:v>
                 </c:pt>
                 <c:pt idx="8">
-                  <c:v>0.0</c:v>
+                  <c:v>0</c:v>
                 </c:pt>
                 <c:pt idx="9">
-                  <c:v>0.0</c:v>
+                  <c:v>0</c:v>
                 </c:pt>
                 <c:pt idx="10">
-                  <c:v>0.0</c:v>
+                  <c:v>0</c:v>
                 </c:pt>
                 <c:pt idx="11">
-                  <c:v>8.333333333333334</c:v>
+                  <c:v>8.3333333333333339</c:v>
                 </c:pt>
               </c:numCache>
             </c:numRef>
@@ -5234,34 +5234,34 @@
                 <c:formatCode>General</c:formatCode>
                 <c:ptCount val="12"/>
                 <c:pt idx="0">
-                  <c:v>0.0</c:v>
+                  <c:v>0</c:v>
                 </c:pt>
                 <c:pt idx="1">
-                  <c:v>0.0</c:v>
+                  <c:v>0</c:v>
                 </c:pt>
                 <c:pt idx="2">
-                  <c:v>0.0</c:v>
+                  <c:v>0</c:v>
                 </c:pt>
                 <c:pt idx="3">
-                  <c:v>0.0</c:v>
+                  <c:v>0</c:v>
                 </c:pt>
                 <c:pt idx="4">
-                  <c:v>0.0</c:v>
+                  <c:v>0</c:v>
                 </c:pt>
                 <c:pt idx="5">
-                  <c:v>0.0</c:v>
+                  <c:v>0</c:v>
                 </c:pt>
                 <c:pt idx="6">
-                  <c:v>0.0</c:v>
+                  <c:v>0</c:v>
                 </c:pt>
                 <c:pt idx="7">
-                  <c:v>0.0</c:v>
+                  <c:v>0</c:v>
                 </c:pt>
                 <c:pt idx="8">
-                  <c:v>0.0</c:v>
+                  <c:v>0</c:v>
                 </c:pt>
                 <c:pt idx="9">
-                  <c:v>25.0</c:v>
+                  <c:v>25</c:v>
                 </c:pt>
                 <c:pt idx="10">
                   <c:v>16.666666666666668</c:v>
@@ -5353,40 +5353,40 @@
                 <c:formatCode>General</c:formatCode>
                 <c:ptCount val="12"/>
                 <c:pt idx="0">
-                  <c:v>0.0</c:v>
+                  <c:v>0</c:v>
                 </c:pt>
                 <c:pt idx="1">
-                  <c:v>0.0</c:v>
+                  <c:v>0</c:v>
                 </c:pt>
                 <c:pt idx="2">
-                  <c:v>0.0</c:v>
+                  <c:v>0</c:v>
                 </c:pt>
                 <c:pt idx="3">
-                  <c:v>0.0</c:v>
+                  <c:v>0</c:v>
                 </c:pt>
                 <c:pt idx="4">
-                  <c:v>0.0</c:v>
+                  <c:v>0</c:v>
                 </c:pt>
                 <c:pt idx="5">
-                  <c:v>0.0</c:v>
+                  <c:v>0</c:v>
                 </c:pt>
                 <c:pt idx="6">
-                  <c:v>0.0</c:v>
+                  <c:v>0</c:v>
                 </c:pt>
                 <c:pt idx="7">
-                  <c:v>0.0</c:v>
+                  <c:v>0</c:v>
                 </c:pt>
                 <c:pt idx="8">
-                  <c:v>0.0</c:v>
+                  <c:v>0</c:v>
                 </c:pt>
                 <c:pt idx="9">
-                  <c:v>0.0</c:v>
+                  <c:v>0</c:v>
                 </c:pt>
                 <c:pt idx="10">
-                  <c:v>8.333333333333334</c:v>
+                  <c:v>8.3333333333333339</c:v>
                 </c:pt>
                 <c:pt idx="11">
-                  <c:v>0.0</c:v>
+                  <c:v>0</c:v>
                 </c:pt>
               </c:numCache>
             </c:numRef>
@@ -5474,40 +5474,40 @@
                 <c:formatCode>General</c:formatCode>
                 <c:ptCount val="12"/>
                 <c:pt idx="0">
-                  <c:v>100.0</c:v>
+                  <c:v>100</c:v>
                 </c:pt>
                 <c:pt idx="1">
-                  <c:v>100.0</c:v>
+                  <c:v>100</c:v>
                 </c:pt>
                 <c:pt idx="2">
-                  <c:v>100.0</c:v>
+                  <c:v>100</c:v>
                 </c:pt>
                 <c:pt idx="3">
-                  <c:v>100.0</c:v>
+                  <c:v>100</c:v>
                 </c:pt>
                 <c:pt idx="4">
-                  <c:v>100.0</c:v>
+                  <c:v>100</c:v>
                 </c:pt>
                 <c:pt idx="5">
-                  <c:v>100.0</c:v>
+                  <c:v>100</c:v>
                 </c:pt>
                 <c:pt idx="6">
-                  <c:v>100.0</c:v>
+                  <c:v>100</c:v>
                 </c:pt>
                 <c:pt idx="7">
-                  <c:v>100.0</c:v>
+                  <c:v>100</c:v>
                 </c:pt>
                 <c:pt idx="8">
-                  <c:v>100.0</c:v>
+                  <c:v>100</c:v>
                 </c:pt>
                 <c:pt idx="9">
-                  <c:v>8.333333333333334</c:v>
+                  <c:v>8.3333333333333339</c:v>
                 </c:pt>
                 <c:pt idx="10">
-                  <c:v>8.333333333333334</c:v>
+                  <c:v>8.3333333333333339</c:v>
                 </c:pt>
                 <c:pt idx="11">
-                  <c:v>8.333333333333334</c:v>
+                  <c:v>8.3333333333333339</c:v>
                 </c:pt>
               </c:numCache>
             </c:numRef>
@@ -9970,7 +9970,7 @@
           <a:p>
             <a:fld id="{C1255C68-584F-174D-BB81-51BF91708794}" type="datetimeFigureOut">
               <a:rPr lang="en-US" smtClean="0"/>
-              <a:t>3/12/26</a:t>
+              <a:t>3/20/26</a:t>
             </a:fld>
             <a:endParaRPr lang="en-US"/>
           </a:p>
@@ -10147,7 +10147,7 @@
           <a:p>
             <a:fld id="{A1EDAAC4-819D-C544-9EA1-C73624CFD70B}" type="datetimeFigureOut">
               <a:rPr lang="en-US" smtClean="0"/>
-              <a:t>3/12/26</a:t>
+              <a:t>3/20/26</a:t>
             </a:fld>
             <a:endParaRPr lang="en-US"/>
           </a:p>
@@ -31445,7 +31445,7 @@
           <a:p>
             <a:r>
               <a:rPr lang="en-US" dirty="0" err="1"/>
-              <a:t>March 08, 2026</a:t>
+              <a:t>March 20, 2026</a:t>
             </a:r>
             <a:endParaRPr lang="en-US" dirty="0"/>
           </a:p>
@@ -31607,7 +31607,7 @@
       </p:sp>
       <p:graphicFrame>
         <p:nvGraphicFramePr>
-          <p:cNvPr id="6" name="OBJECTIVES_ARCHITECTURE_CHART">
+          <p:cNvPr id="6" name="Chart 5">
             <a:extLst>
               <a:ext uri="{FF2B5EF4-FFF2-40B4-BE49-F238E27FC236}">
                 <a16:creationId xmlns:a16="http://schemas.microsoft.com/office/drawing/2014/main" id="{FBB521E4-96ED-814A-B322-AFBA0633E84C}"/>
@@ -31615,13 +31615,7 @@
             </a:extLst>
           </p:cNvPr>
           <p:cNvGraphicFramePr/>
-          <p:nvPr>
-            <p:extLst>
-              <p:ext uri="{D42A27DB-BD31-4B8C-83A1-F6EECF244321}">
-                <p14:modId xmlns:p14="http://schemas.microsoft.com/office/powerpoint/2010/main" val="687656309"/>
-              </p:ext>
-            </p:extLst>
-          </p:nvPr>
+          <p:nvPr/>
         </p:nvGraphicFramePr>
         <p:xfrm>
           <a:off x="478224" y="1606666"/>
@@ -31936,13 +31930,12 @@
               <a:rPr lang="en-US"/>
               <a:t>Progress towards objectives between January 2026 and March 2026</a:t>
             </a:r>
-            <a:endParaRPr lang="en-US"/>
           </a:p>
         </p:txBody>
       </p:sp>
       <p:graphicFrame>
         <p:nvGraphicFramePr>
-          <p:cNvPr id="6" name="OBJECTIVES_STATUS_CHART">
+          <p:cNvPr id="6" name="Chart 5">
             <a:extLst>
               <a:ext uri="{FF2B5EF4-FFF2-40B4-BE49-F238E27FC236}">
                 <a16:creationId xmlns:a16="http://schemas.microsoft.com/office/drawing/2014/main" id="{9A17AFA3-FC96-B65B-0A6A-D4A1754157FE}"/>
@@ -31953,7 +31946,7 @@
           <p:nvPr>
             <p:extLst>
               <p:ext uri="{D42A27DB-BD31-4B8C-83A1-F6EECF244321}">
-                <p14:modId xmlns:p14="http://schemas.microsoft.com/office/powerpoint/2010/main" val="1764705810"/>
+                <p14:modId xmlns:p14="http://schemas.microsoft.com/office/powerpoint/2010/main" val="469187844"/>
               </p:ext>
             </p:extLst>
           </p:nvPr>
@@ -32244,7 +32237,7 @@
           <a:lstStyle/>
           <a:p>
             <a:r>
-              <a:rPr lang="en-US" dirty="0"/>
+              <a:rPr lang="en-US"/>
               <a:t>Progress towards objectives per team between January 2026 and March 2026</a:t>
             </a:r>
           </a:p>
@@ -32252,7 +32245,7 @@
       </p:sp>
       <p:graphicFrame>
         <p:nvGraphicFramePr>
-          <p:cNvPr id="6" name="OBJECTIVES_TEAM_CHART">
+          <p:cNvPr id="6" name="Chart 5">
             <a:extLst>
               <a:ext uri="{FF2B5EF4-FFF2-40B4-BE49-F238E27FC236}">
                 <a16:creationId xmlns:a16="http://schemas.microsoft.com/office/drawing/2014/main" id="{C8EC5A35-9538-D995-065E-528B18F85DED}"/>
@@ -32557,13 +32550,12 @@
               <a:rPr lang="en-US"/>
               <a:t>Progress towards objectives per capability between January 2026 and March 2026</a:t>
             </a:r>
-            <a:endParaRPr lang="en-US"/>
           </a:p>
         </p:txBody>
       </p:sp>
       <p:graphicFrame>
         <p:nvGraphicFramePr>
-          <p:cNvPr id="6" name="OBJECTIVES_CAPABILITY_CHART">
+          <p:cNvPr id="6" name="Chart 5">
             <a:extLst>
               <a:ext uri="{FF2B5EF4-FFF2-40B4-BE49-F238E27FC236}">
                 <a16:creationId xmlns:a16="http://schemas.microsoft.com/office/drawing/2014/main" id="{2774041C-71AE-0495-78BB-3253007E9E90}"/>
@@ -32873,7 +32865,7 @@
       </p:sp>
       <p:graphicFrame>
         <p:nvGraphicFramePr>
-          <p:cNvPr id="6" name="OBJECTIVES_OVERALL_CHART">
+          <p:cNvPr id="6" name="Chart 5">
             <a:extLst>
               <a:ext uri="{FF2B5EF4-FFF2-40B4-BE49-F238E27FC236}">
                 <a16:creationId xmlns:a16="http://schemas.microsoft.com/office/drawing/2014/main" id="{CED42228-B917-5A3E-BB6B-9871F4C489AA}"/>
@@ -33392,7 +33384,7 @@
       </p:sp>
       <p:graphicFrame>
         <p:nvGraphicFramePr>
-          <p:cNvPr id="6" name="OBJECTIVES_SECURITY_CHART">
+          <p:cNvPr id="6" name="Chart 5">
             <a:extLst>
               <a:ext uri="{FF2B5EF4-FFF2-40B4-BE49-F238E27FC236}">
                 <a16:creationId xmlns:a16="http://schemas.microsoft.com/office/drawing/2014/main" id="{EA804B61-8F8C-C6D5-94BB-B5CA583E7BE3}"/>
@@ -33400,13 +33392,7 @@
             </a:extLst>
           </p:cNvPr>
           <p:cNvGraphicFramePr/>
-          <p:nvPr>
-            <p:extLst>
-              <p:ext uri="{D42A27DB-BD31-4B8C-83A1-F6EECF244321}">
-                <p14:modId xmlns:p14="http://schemas.microsoft.com/office/powerpoint/2010/main" val="3697432841"/>
-              </p:ext>
-            </p:extLst>
-          </p:nvPr>
+          <p:nvPr/>
         </p:nvGraphicFramePr>
         <p:xfrm>
           <a:off x="478224" y="1606666"/>
@@ -33702,7 +33688,7 @@
       </p:sp>
       <p:graphicFrame>
         <p:nvGraphicFramePr>
-          <p:cNvPr id="6" name="OBJECTIVES_OSH_CHART">
+          <p:cNvPr id="6" name="Chart 5">
             <a:extLst>
               <a:ext uri="{FF2B5EF4-FFF2-40B4-BE49-F238E27FC236}">
                 <a16:creationId xmlns:a16="http://schemas.microsoft.com/office/drawing/2014/main" id="{1551057A-38E3-B1CD-A98D-FA6566BDC6A6}"/>
@@ -33710,13 +33696,7 @@
             </a:extLst>
           </p:cNvPr>
           <p:cNvGraphicFramePr/>
-          <p:nvPr>
-            <p:extLst>
-              <p:ext uri="{D42A27DB-BD31-4B8C-83A1-F6EECF244321}">
-                <p14:modId xmlns:p14="http://schemas.microsoft.com/office/powerpoint/2010/main" val="4148586428"/>
-              </p:ext>
-            </p:extLst>
-          </p:nvPr>
+          <p:nvPr/>
         </p:nvGraphicFramePr>
         <p:xfrm>
           <a:off x="478224" y="1606666"/>
@@ -34012,7 +33992,7 @@
       </p:sp>
       <p:graphicFrame>
         <p:nvGraphicFramePr>
-          <p:cNvPr id="6" name="OBJECTIVES_MAINTAINABILITY_CHART">
+          <p:cNvPr id="6" name="Chart 5">
             <a:extLst>
               <a:ext uri="{FF2B5EF4-FFF2-40B4-BE49-F238E27FC236}">
                 <a16:creationId xmlns:a16="http://schemas.microsoft.com/office/drawing/2014/main" id="{D309D7A3-6D2B-5238-FDCA-89277EA3E24A}"/>
@@ -34020,13 +34000,7 @@
             </a:extLst>
           </p:cNvPr>
           <p:cNvGraphicFramePr/>
-          <p:nvPr>
-            <p:extLst>
-              <p:ext uri="{D42A27DB-BD31-4B8C-83A1-F6EECF244321}">
-                <p14:modId xmlns:p14="http://schemas.microsoft.com/office/powerpoint/2010/main" val="3629184054"/>
-              </p:ext>
-            </p:extLst>
-          </p:nvPr>
+          <p:nvPr/>
         </p:nvGraphicFramePr>
         <p:xfrm>
           <a:off x="478224" y="1606666"/>

--- a/report-generator/tests/report_generator/integration/references/reference_objectives.pptx
+++ b/report-generator/tests/report_generator/integration/references/reference_objectives.pptx
@@ -290,7 +290,7 @@
                 <c:formatCode>General</c:formatCode>
                 <c:ptCount val="1"/>
                 <c:pt idx="0">
-                  <c:v>0</c:v>
+                  <c:v>0.0</c:v>
                 </c:pt>
               </c:numCache>
             </c:numRef>
@@ -343,7 +343,7 @@
                 <c:formatCode>General</c:formatCode>
                 <c:ptCount val="1"/>
                 <c:pt idx="0">
-                  <c:v>43.243243243243242</c:v>
+                  <c:v>43.24324324324324</c:v>
                 </c:pt>
               </c:numCache>
             </c:numRef>
@@ -396,7 +396,7 @@
                 <c:formatCode>General</c:formatCode>
                 <c:ptCount val="1"/>
                 <c:pt idx="0">
-                  <c:v>5.4054054054054053</c:v>
+                  <c:v>5.405405405405405</c:v>
                 </c:pt>
               </c:numCache>
             </c:numRef>
@@ -738,7 +738,7 @@
                 <c:formatCode>General</c:formatCode>
                 <c:ptCount val="1"/>
                 <c:pt idx="0">
-                  <c:v>0</c:v>
+                  <c:v>0.0</c:v>
                 </c:pt>
               </c:numCache>
             </c:numRef>
@@ -791,7 +791,7 @@
                 <c:formatCode>General</c:formatCode>
                 <c:ptCount val="1"/>
                 <c:pt idx="0">
-                  <c:v>43.243243243243242</c:v>
+                  <c:v>43.24324324324324</c:v>
                 </c:pt>
               </c:numCache>
             </c:numRef>
@@ -844,7 +844,7 @@
                 <c:formatCode>General</c:formatCode>
                 <c:ptCount val="1"/>
                 <c:pt idx="0">
-                  <c:v>5.4054054054054053</c:v>
+                  <c:v>5.405405405405405</c:v>
                 </c:pt>
               </c:numCache>
             </c:numRef>
@@ -1172,10 +1172,10 @@
                 <c:formatCode>General</c:formatCode>
                 <c:ptCount val="4"/>
                 <c:pt idx="0">
-                  <c:v>66.666666666666671</c:v>
+                  <c:v>66.66666666666667</c:v>
                 </c:pt>
                 <c:pt idx="1">
-                  <c:v>46.153846153846153</c:v>
+                  <c:v>46.15384615384615</c:v>
                 </c:pt>
                 <c:pt idx="2">
                   <c:v>33.333333333333336</c:v>
@@ -1243,13 +1243,13 @@
                 <c:formatCode>General</c:formatCode>
                 <c:ptCount val="4"/>
                 <c:pt idx="0">
-                  <c:v>0</c:v>
+                  <c:v>0.0</c:v>
                 </c:pt>
                 <c:pt idx="1">
-                  <c:v>0</c:v>
+                  <c:v>0.0</c:v>
                 </c:pt>
                 <c:pt idx="2">
-                  <c:v>0</c:v>
+                  <c:v>0.0</c:v>
                 </c:pt>
                 <c:pt idx="3">
                   <c:v>0</c:v>
@@ -1317,10 +1317,10 @@
                   <c:v>16.666666666666668</c:v>
                 </c:pt>
                 <c:pt idx="1">
-                  <c:v>46.153846153846153</c:v>
+                  <c:v>46.15384615384615</c:v>
                 </c:pt>
                 <c:pt idx="2">
-                  <c:v>66.666666666666671</c:v>
+                  <c:v>66.66666666666667</c:v>
                 </c:pt>
                 <c:pt idx="3">
                   <c:v>0</c:v>
@@ -1385,13 +1385,13 @@
                 <c:formatCode>General</c:formatCode>
                 <c:ptCount val="4"/>
                 <c:pt idx="0">
-                  <c:v>8.3333333333333339</c:v>
+                  <c:v>8.333333333333334</c:v>
                 </c:pt>
                 <c:pt idx="1">
                   <c:v>7.6923076923076925</c:v>
                 </c:pt>
                 <c:pt idx="2">
-                  <c:v>0</c:v>
+                  <c:v>0.0</c:v>
                 </c:pt>
                 <c:pt idx="3">
                   <c:v>0</c:v>
@@ -1458,13 +1458,13 @@
                 <c:formatCode>General</c:formatCode>
                 <c:ptCount val="4"/>
                 <c:pt idx="0">
-                  <c:v>8.3333333333333339</c:v>
+                  <c:v>8.333333333333334</c:v>
                 </c:pt>
                 <c:pt idx="1">
-                  <c:v>0</c:v>
+                  <c:v>0.0</c:v>
                 </c:pt>
                 <c:pt idx="2">
-                  <c:v>0</c:v>
+                  <c:v>0.0</c:v>
                 </c:pt>
                 <c:pt idx="3">
                   <c:v>0</c:v>
@@ -1764,25 +1764,25 @@
                 <c:formatCode>General</c:formatCode>
                 <c:ptCount val="12"/>
                 <c:pt idx="0">
-                  <c:v>0</c:v>
+                  <c:v>0.0</c:v>
                 </c:pt>
                 <c:pt idx="1">
-                  <c:v>0</c:v>
+                  <c:v>0.0</c:v>
                 </c:pt>
                 <c:pt idx="2">
-                  <c:v>0</c:v>
+                  <c:v>0.0</c:v>
                 </c:pt>
                 <c:pt idx="3">
-                  <c:v>0</c:v>
+                  <c:v>0.0</c:v>
                 </c:pt>
                 <c:pt idx="4">
-                  <c:v>0</c:v>
+                  <c:v>0.0</c:v>
                 </c:pt>
                 <c:pt idx="5">
-                  <c:v>0</c:v>
+                  <c:v>0.0</c:v>
                 </c:pt>
                 <c:pt idx="6">
-                  <c:v>0</c:v>
+                  <c:v>0.0</c:v>
                 </c:pt>
                 <c:pt idx="7">
                   <c:v>2.7027027027027026</c:v>
@@ -1883,40 +1883,40 @@
                 <c:formatCode>General</c:formatCode>
                 <c:ptCount val="12"/>
                 <c:pt idx="0">
-                  <c:v>0</c:v>
+                  <c:v>0.0</c:v>
                 </c:pt>
                 <c:pt idx="1">
-                  <c:v>0</c:v>
+                  <c:v>0.0</c:v>
                 </c:pt>
                 <c:pt idx="2">
-                  <c:v>0</c:v>
+                  <c:v>0.0</c:v>
                 </c:pt>
                 <c:pt idx="3">
-                  <c:v>0</c:v>
+                  <c:v>0.0</c:v>
                 </c:pt>
                 <c:pt idx="4">
-                  <c:v>0</c:v>
+                  <c:v>0.0</c:v>
                 </c:pt>
                 <c:pt idx="5">
-                  <c:v>0</c:v>
+                  <c:v>0.0</c:v>
                 </c:pt>
                 <c:pt idx="6">
-                  <c:v>0</c:v>
+                  <c:v>0.0</c:v>
                 </c:pt>
                 <c:pt idx="7">
-                  <c:v>0</c:v>
+                  <c:v>0.0</c:v>
                 </c:pt>
                 <c:pt idx="8">
-                  <c:v>0</c:v>
+                  <c:v>0.0</c:v>
                 </c:pt>
                 <c:pt idx="9">
-                  <c:v>0</c:v>
+                  <c:v>0.0</c:v>
                 </c:pt>
                 <c:pt idx="10">
-                  <c:v>0</c:v>
+                  <c:v>0.0</c:v>
                 </c:pt>
                 <c:pt idx="11">
-                  <c:v>5.4054054054054053</c:v>
+                  <c:v>5.405405405405405</c:v>
                 </c:pt>
               </c:numCache>
             </c:numRef>
@@ -2002,25 +2002,25 @@
                 <c:formatCode>General</c:formatCode>
                 <c:ptCount val="12"/>
                 <c:pt idx="0">
-                  <c:v>0</c:v>
+                  <c:v>0.0</c:v>
                 </c:pt>
                 <c:pt idx="1">
-                  <c:v>0</c:v>
+                  <c:v>0.0</c:v>
                 </c:pt>
                 <c:pt idx="2">
-                  <c:v>0</c:v>
+                  <c:v>0.0</c:v>
                 </c:pt>
                 <c:pt idx="3">
-                  <c:v>0</c:v>
+                  <c:v>0.0</c:v>
                 </c:pt>
                 <c:pt idx="4">
-                  <c:v>0</c:v>
+                  <c:v>0.0</c:v>
                 </c:pt>
                 <c:pt idx="5">
-                  <c:v>0</c:v>
+                  <c:v>0.0</c:v>
                 </c:pt>
                 <c:pt idx="6">
-                  <c:v>0</c:v>
+                  <c:v>0.0</c:v>
                 </c:pt>
                 <c:pt idx="7">
                   <c:v>2.7027027027027026</c:v>
@@ -2121,31 +2121,31 @@
                 <c:formatCode>General</c:formatCode>
                 <c:ptCount val="12"/>
                 <c:pt idx="0">
-                  <c:v>0</c:v>
+                  <c:v>0.0</c:v>
                 </c:pt>
                 <c:pt idx="1">
-                  <c:v>0</c:v>
+                  <c:v>0.0</c:v>
                 </c:pt>
                 <c:pt idx="2">
-                  <c:v>0</c:v>
+                  <c:v>0.0</c:v>
                 </c:pt>
                 <c:pt idx="3">
-                  <c:v>0</c:v>
+                  <c:v>0.0</c:v>
                 </c:pt>
                 <c:pt idx="4">
-                  <c:v>0</c:v>
+                  <c:v>0.0</c:v>
                 </c:pt>
                 <c:pt idx="5">
-                  <c:v>0</c:v>
+                  <c:v>0.0</c:v>
                 </c:pt>
                 <c:pt idx="6">
-                  <c:v>0</c:v>
+                  <c:v>0.0</c:v>
                 </c:pt>
                 <c:pt idx="7">
-                  <c:v>0</c:v>
+                  <c:v>0.0</c:v>
                 </c:pt>
                 <c:pt idx="8">
-                  <c:v>0</c:v>
+                  <c:v>0.0</c:v>
                 </c:pt>
                 <c:pt idx="9">
                   <c:v>2.7027027027027026</c:v>
@@ -2154,7 +2154,7 @@
                   <c:v>2.7027027027027026</c:v>
                 </c:pt>
                 <c:pt idx="11">
-                  <c:v>0</c:v>
+                  <c:v>0.0</c:v>
                 </c:pt>
               </c:numCache>
             </c:numRef>
@@ -2242,31 +2242,31 @@
                 <c:formatCode>General</c:formatCode>
                 <c:ptCount val="12"/>
                 <c:pt idx="0">
-                  <c:v>100</c:v>
+                  <c:v>100.0</c:v>
                 </c:pt>
                 <c:pt idx="1">
-                  <c:v>100</c:v>
+                  <c:v>100.0</c:v>
                 </c:pt>
                 <c:pt idx="2">
-                  <c:v>100</c:v>
+                  <c:v>100.0</c:v>
                 </c:pt>
                 <c:pt idx="3">
-                  <c:v>100</c:v>
+                  <c:v>100.0</c:v>
                 </c:pt>
                 <c:pt idx="4">
-                  <c:v>100</c:v>
+                  <c:v>100.0</c:v>
                 </c:pt>
                 <c:pt idx="5">
-                  <c:v>100</c:v>
+                  <c:v>100.0</c:v>
                 </c:pt>
                 <c:pt idx="6">
-                  <c:v>100</c:v>
+                  <c:v>100.0</c:v>
                 </c:pt>
                 <c:pt idx="7">
-                  <c:v>94.594594594594597</c:v>
+                  <c:v>94.5945945945946</c:v>
                 </c:pt>
                 <c:pt idx="8">
-                  <c:v>94.594594594594597</c:v>
+                  <c:v>94.5945945945946</c:v>
                 </c:pt>
                 <c:pt idx="9">
                   <c:v>24.324324324324323</c:v>
@@ -3380,31 +3380,31 @@
                 <c:formatCode>General</c:formatCode>
                 <c:ptCount val="12"/>
                 <c:pt idx="0">
-                  <c:v>0</c:v>
+                  <c:v>0.0</c:v>
                 </c:pt>
                 <c:pt idx="1">
-                  <c:v>0</c:v>
+                  <c:v>0.0</c:v>
                 </c:pt>
                 <c:pt idx="2">
-                  <c:v>0</c:v>
+                  <c:v>0.0</c:v>
                 </c:pt>
                 <c:pt idx="3">
-                  <c:v>0</c:v>
+                  <c:v>0.0</c:v>
                 </c:pt>
                 <c:pt idx="4">
-                  <c:v>0</c:v>
+                  <c:v>0.0</c:v>
                 </c:pt>
                 <c:pt idx="5">
-                  <c:v>0</c:v>
+                  <c:v>0.0</c:v>
                 </c:pt>
                 <c:pt idx="6">
-                  <c:v>0</c:v>
+                  <c:v>0.0</c:v>
                 </c:pt>
                 <c:pt idx="7">
-                  <c:v>8.3333333333333339</c:v>
+                  <c:v>8.333333333333334</c:v>
                 </c:pt>
                 <c:pt idx="8">
-                  <c:v>8.3333333333333339</c:v>
+                  <c:v>8.333333333333334</c:v>
                 </c:pt>
                 <c:pt idx="9">
                   <c:v>33.333333333333336</c:v>
@@ -3499,40 +3499,40 @@
                 <c:formatCode>General</c:formatCode>
                 <c:ptCount val="12"/>
                 <c:pt idx="0">
-                  <c:v>0</c:v>
+                  <c:v>0.0</c:v>
                 </c:pt>
                 <c:pt idx="1">
-                  <c:v>0</c:v>
+                  <c:v>0.0</c:v>
                 </c:pt>
                 <c:pt idx="2">
-                  <c:v>0</c:v>
+                  <c:v>0.0</c:v>
                 </c:pt>
                 <c:pt idx="3">
-                  <c:v>0</c:v>
+                  <c:v>0.0</c:v>
                 </c:pt>
                 <c:pt idx="4">
-                  <c:v>0</c:v>
+                  <c:v>0.0</c:v>
                 </c:pt>
                 <c:pt idx="5">
-                  <c:v>0</c:v>
+                  <c:v>0.0</c:v>
                 </c:pt>
                 <c:pt idx="6">
-                  <c:v>0</c:v>
+                  <c:v>0.0</c:v>
                 </c:pt>
                 <c:pt idx="7">
-                  <c:v>0</c:v>
+                  <c:v>0.0</c:v>
                 </c:pt>
                 <c:pt idx="8">
-                  <c:v>0</c:v>
+                  <c:v>0.0</c:v>
                 </c:pt>
                 <c:pt idx="9">
-                  <c:v>0</c:v>
+                  <c:v>0.0</c:v>
                 </c:pt>
                 <c:pt idx="10">
-                  <c:v>0</c:v>
+                  <c:v>0.0</c:v>
                 </c:pt>
                 <c:pt idx="11">
-                  <c:v>8.3333333333333339</c:v>
+                  <c:v>8.333333333333334</c:v>
                 </c:pt>
               </c:numCache>
             </c:numRef>
@@ -3618,40 +3618,40 @@
                 <c:formatCode>General</c:formatCode>
                 <c:ptCount val="12"/>
                 <c:pt idx="0">
-                  <c:v>0</c:v>
+                  <c:v>0.0</c:v>
                 </c:pt>
                 <c:pt idx="1">
-                  <c:v>0</c:v>
+                  <c:v>0.0</c:v>
                 </c:pt>
                 <c:pt idx="2">
-                  <c:v>0</c:v>
+                  <c:v>0.0</c:v>
                 </c:pt>
                 <c:pt idx="3">
-                  <c:v>0</c:v>
+                  <c:v>0.0</c:v>
                 </c:pt>
                 <c:pt idx="4">
-                  <c:v>0</c:v>
+                  <c:v>0.0</c:v>
                 </c:pt>
                 <c:pt idx="5">
-                  <c:v>0</c:v>
+                  <c:v>0.0</c:v>
                 </c:pt>
                 <c:pt idx="6">
-                  <c:v>0</c:v>
+                  <c:v>0.0</c:v>
                 </c:pt>
                 <c:pt idx="7">
-                  <c:v>0</c:v>
+                  <c:v>0.0</c:v>
                 </c:pt>
                 <c:pt idx="8">
-                  <c:v>0</c:v>
+                  <c:v>0.0</c:v>
                 </c:pt>
                 <c:pt idx="9">
-                  <c:v>0</c:v>
+                  <c:v>0.0</c:v>
                 </c:pt>
                 <c:pt idx="10">
-                  <c:v>66.666666666666671</c:v>
+                  <c:v>66.66666666666667</c:v>
                 </c:pt>
                 <c:pt idx="11">
-                  <c:v>50</c:v>
+                  <c:v>50.0</c:v>
                 </c:pt>
               </c:numCache>
             </c:numRef>
@@ -3737,40 +3737,40 @@
                 <c:formatCode>General</c:formatCode>
                 <c:ptCount val="12"/>
                 <c:pt idx="0">
-                  <c:v>0</c:v>
+                  <c:v>0.0</c:v>
                 </c:pt>
                 <c:pt idx="1">
-                  <c:v>0</c:v>
+                  <c:v>0.0</c:v>
                 </c:pt>
                 <c:pt idx="2">
-                  <c:v>0</c:v>
+                  <c:v>0.0</c:v>
                 </c:pt>
                 <c:pt idx="3">
-                  <c:v>0</c:v>
+                  <c:v>0.0</c:v>
                 </c:pt>
                 <c:pt idx="4">
-                  <c:v>0</c:v>
+                  <c:v>0.0</c:v>
                 </c:pt>
                 <c:pt idx="5">
-                  <c:v>0</c:v>
+                  <c:v>0.0</c:v>
                 </c:pt>
                 <c:pt idx="6">
-                  <c:v>0</c:v>
+                  <c:v>0.0</c:v>
                 </c:pt>
                 <c:pt idx="7">
-                  <c:v>0</c:v>
+                  <c:v>0.0</c:v>
                 </c:pt>
                 <c:pt idx="8">
-                  <c:v>0</c:v>
+                  <c:v>0.0</c:v>
                 </c:pt>
                 <c:pt idx="9">
-                  <c:v>0</c:v>
+                  <c:v>0.0</c:v>
                 </c:pt>
                 <c:pt idx="10">
-                  <c:v>0</c:v>
+                  <c:v>0.0</c:v>
                 </c:pt>
                 <c:pt idx="11">
-                  <c:v>0</c:v>
+                  <c:v>0.0</c:v>
                 </c:pt>
               </c:numCache>
             </c:numRef>
@@ -3858,40 +3858,40 @@
                 <c:formatCode>General</c:formatCode>
                 <c:ptCount val="12"/>
                 <c:pt idx="0">
-                  <c:v>100</c:v>
+                  <c:v>100.0</c:v>
                 </c:pt>
                 <c:pt idx="1">
-                  <c:v>100</c:v>
+                  <c:v>100.0</c:v>
                 </c:pt>
                 <c:pt idx="2">
-                  <c:v>100</c:v>
+                  <c:v>100.0</c:v>
                 </c:pt>
                 <c:pt idx="3">
-                  <c:v>100</c:v>
+                  <c:v>100.0</c:v>
                 </c:pt>
                 <c:pt idx="4">
-                  <c:v>100</c:v>
+                  <c:v>100.0</c:v>
                 </c:pt>
                 <c:pt idx="5">
-                  <c:v>100</c:v>
+                  <c:v>100.0</c:v>
                 </c:pt>
                 <c:pt idx="6">
-                  <c:v>100</c:v>
+                  <c:v>100.0</c:v>
                 </c:pt>
                 <c:pt idx="7">
-                  <c:v>91.666666666666671</c:v>
+                  <c:v>91.66666666666667</c:v>
                 </c:pt>
                 <c:pt idx="8">
-                  <c:v>91.666666666666671</c:v>
+                  <c:v>91.66666666666667</c:v>
                 </c:pt>
                 <c:pt idx="9">
-                  <c:v>66.666666666666671</c:v>
+                  <c:v>66.66666666666667</c:v>
                 </c:pt>
                 <c:pt idx="10">
-                  <c:v>0</c:v>
+                  <c:v>0.0</c:v>
                 </c:pt>
                 <c:pt idx="11">
-                  <c:v>0</c:v>
+                  <c:v>0.0</c:v>
                 </c:pt>
               </c:numCache>
             </c:numRef>
@@ -4188,40 +4188,40 @@
                 <c:formatCode>General</c:formatCode>
                 <c:ptCount val="12"/>
                 <c:pt idx="0">
-                  <c:v>0</c:v>
+                  <c:v>0.0</c:v>
                 </c:pt>
                 <c:pt idx="1">
-                  <c:v>0</c:v>
+                  <c:v>0.0</c:v>
                 </c:pt>
                 <c:pt idx="2">
-                  <c:v>0</c:v>
+                  <c:v>0.0</c:v>
                 </c:pt>
                 <c:pt idx="3">
-                  <c:v>0</c:v>
+                  <c:v>0.0</c:v>
                 </c:pt>
                 <c:pt idx="4">
-                  <c:v>0</c:v>
+                  <c:v>0.0</c:v>
                 </c:pt>
                 <c:pt idx="5">
-                  <c:v>0</c:v>
+                  <c:v>0.0</c:v>
                 </c:pt>
                 <c:pt idx="6">
-                  <c:v>0</c:v>
+                  <c:v>0.0</c:v>
                 </c:pt>
                 <c:pt idx="7">
-                  <c:v>0</c:v>
+                  <c:v>0.0</c:v>
                 </c:pt>
                 <c:pt idx="8">
-                  <c:v>0</c:v>
+                  <c:v>0.0</c:v>
                 </c:pt>
                 <c:pt idx="9">
-                  <c:v>46.153846153846153</c:v>
+                  <c:v>46.15384615384615</c:v>
                 </c:pt>
                 <c:pt idx="10">
-                  <c:v>46.153846153846153</c:v>
+                  <c:v>46.15384615384615</c:v>
                 </c:pt>
                 <c:pt idx="11">
-                  <c:v>46.153846153846153</c:v>
+                  <c:v>46.15384615384615</c:v>
                 </c:pt>
               </c:numCache>
             </c:numRef>
@@ -4307,40 +4307,40 @@
                 <c:formatCode>General</c:formatCode>
                 <c:ptCount val="12"/>
                 <c:pt idx="0">
-                  <c:v>0</c:v>
+                  <c:v>0.0</c:v>
                 </c:pt>
                 <c:pt idx="1">
-                  <c:v>0</c:v>
+                  <c:v>0.0</c:v>
                 </c:pt>
                 <c:pt idx="2">
-                  <c:v>0</c:v>
+                  <c:v>0.0</c:v>
                 </c:pt>
                 <c:pt idx="3">
-                  <c:v>0</c:v>
+                  <c:v>0.0</c:v>
                 </c:pt>
                 <c:pt idx="4">
-                  <c:v>0</c:v>
+                  <c:v>0.0</c:v>
                 </c:pt>
                 <c:pt idx="5">
-                  <c:v>0</c:v>
+                  <c:v>0.0</c:v>
                 </c:pt>
                 <c:pt idx="6">
-                  <c:v>0</c:v>
+                  <c:v>0.0</c:v>
                 </c:pt>
                 <c:pt idx="7">
-                  <c:v>0</c:v>
+                  <c:v>0.0</c:v>
                 </c:pt>
                 <c:pt idx="8">
-                  <c:v>0</c:v>
+                  <c:v>0.0</c:v>
                 </c:pt>
                 <c:pt idx="9">
-                  <c:v>0</c:v>
+                  <c:v>0.0</c:v>
                 </c:pt>
                 <c:pt idx="10">
-                  <c:v>0</c:v>
+                  <c:v>0.0</c:v>
                 </c:pt>
                 <c:pt idx="11">
-                  <c:v>0</c:v>
+                  <c:v>0.0</c:v>
                 </c:pt>
               </c:numCache>
             </c:numRef>
@@ -4426,25 +4426,25 @@
                 <c:formatCode>General</c:formatCode>
                 <c:ptCount val="12"/>
                 <c:pt idx="0">
-                  <c:v>0</c:v>
+                  <c:v>0.0</c:v>
                 </c:pt>
                 <c:pt idx="1">
-                  <c:v>0</c:v>
+                  <c:v>0.0</c:v>
                 </c:pt>
                 <c:pt idx="2">
-                  <c:v>0</c:v>
+                  <c:v>0.0</c:v>
                 </c:pt>
                 <c:pt idx="3">
-                  <c:v>0</c:v>
+                  <c:v>0.0</c:v>
                 </c:pt>
                 <c:pt idx="4">
-                  <c:v>0</c:v>
+                  <c:v>0.0</c:v>
                 </c:pt>
                 <c:pt idx="5">
-                  <c:v>0</c:v>
+                  <c:v>0.0</c:v>
                 </c:pt>
                 <c:pt idx="6">
-                  <c:v>0</c:v>
+                  <c:v>0.0</c:v>
                 </c:pt>
                 <c:pt idx="7">
                   <c:v>7.6923076923076925</c:v>
@@ -4453,13 +4453,13 @@
                   <c:v>7.6923076923076925</c:v>
                 </c:pt>
                 <c:pt idx="9">
-                  <c:v>46.153846153846153</c:v>
+                  <c:v>46.15384615384615</c:v>
                 </c:pt>
                 <c:pt idx="10">
-                  <c:v>53.846153846153847</c:v>
+                  <c:v>53.84615384615385</c:v>
                 </c:pt>
                 <c:pt idx="11">
-                  <c:v>53.846153846153847</c:v>
+                  <c:v>53.84615384615385</c:v>
                 </c:pt>
               </c:numCache>
             </c:numRef>
@@ -4545,40 +4545,40 @@
                 <c:formatCode>General</c:formatCode>
                 <c:ptCount val="12"/>
                 <c:pt idx="0">
-                  <c:v>0</c:v>
+                  <c:v>0.0</c:v>
                 </c:pt>
                 <c:pt idx="1">
-                  <c:v>0</c:v>
+                  <c:v>0.0</c:v>
                 </c:pt>
                 <c:pt idx="2">
-                  <c:v>0</c:v>
+                  <c:v>0.0</c:v>
                 </c:pt>
                 <c:pt idx="3">
-                  <c:v>0</c:v>
+                  <c:v>0.0</c:v>
                 </c:pt>
                 <c:pt idx="4">
-                  <c:v>0</c:v>
+                  <c:v>0.0</c:v>
                 </c:pt>
                 <c:pt idx="5">
-                  <c:v>0</c:v>
+                  <c:v>0.0</c:v>
                 </c:pt>
                 <c:pt idx="6">
-                  <c:v>0</c:v>
+                  <c:v>0.0</c:v>
                 </c:pt>
                 <c:pt idx="7">
-                  <c:v>0</c:v>
+                  <c:v>0.0</c:v>
                 </c:pt>
                 <c:pt idx="8">
-                  <c:v>0</c:v>
+                  <c:v>0.0</c:v>
                 </c:pt>
                 <c:pt idx="9">
                   <c:v>7.6923076923076925</c:v>
                 </c:pt>
                 <c:pt idx="10">
-                  <c:v>0</c:v>
+                  <c:v>0.0</c:v>
                 </c:pt>
                 <c:pt idx="11">
-                  <c:v>0</c:v>
+                  <c:v>0.0</c:v>
                 </c:pt>
               </c:numCache>
             </c:numRef>
@@ -4666,40 +4666,40 @@
                 <c:formatCode>General</c:formatCode>
                 <c:ptCount val="12"/>
                 <c:pt idx="0">
-                  <c:v>100</c:v>
+                  <c:v>100.0</c:v>
                 </c:pt>
                 <c:pt idx="1">
-                  <c:v>100</c:v>
+                  <c:v>100.0</c:v>
                 </c:pt>
                 <c:pt idx="2">
-                  <c:v>100</c:v>
+                  <c:v>100.0</c:v>
                 </c:pt>
                 <c:pt idx="3">
-                  <c:v>100</c:v>
+                  <c:v>100.0</c:v>
                 </c:pt>
                 <c:pt idx="4">
-                  <c:v>100</c:v>
+                  <c:v>100.0</c:v>
                 </c:pt>
                 <c:pt idx="5">
-                  <c:v>100</c:v>
+                  <c:v>100.0</c:v>
                 </c:pt>
                 <c:pt idx="6">
-                  <c:v>100</c:v>
+                  <c:v>100.0</c:v>
                 </c:pt>
                 <c:pt idx="7">
-                  <c:v>92.307692307692307</c:v>
+                  <c:v>92.3076923076923</c:v>
                 </c:pt>
                 <c:pt idx="8">
-                  <c:v>92.307692307692307</c:v>
+                  <c:v>92.3076923076923</c:v>
                 </c:pt>
                 <c:pt idx="9">
-                  <c:v>0</c:v>
+                  <c:v>0.0</c:v>
                 </c:pt>
                 <c:pt idx="10">
-                  <c:v>0</c:v>
+                  <c:v>0.0</c:v>
                 </c:pt>
                 <c:pt idx="11">
-                  <c:v>0</c:v>
+                  <c:v>0.0</c:v>
                 </c:pt>
               </c:numCache>
             </c:numRef>
@@ -4996,40 +4996,40 @@
                 <c:formatCode>General</c:formatCode>
                 <c:ptCount val="12"/>
                 <c:pt idx="0">
-                  <c:v>0</c:v>
+                  <c:v>0.0</c:v>
                 </c:pt>
                 <c:pt idx="1">
-                  <c:v>0</c:v>
+                  <c:v>0.0</c:v>
                 </c:pt>
                 <c:pt idx="2">
-                  <c:v>0</c:v>
+                  <c:v>0.0</c:v>
                 </c:pt>
                 <c:pt idx="3">
-                  <c:v>0</c:v>
+                  <c:v>0.0</c:v>
                 </c:pt>
                 <c:pt idx="4">
-                  <c:v>0</c:v>
+                  <c:v>0.0</c:v>
                 </c:pt>
                 <c:pt idx="5">
-                  <c:v>0</c:v>
+                  <c:v>0.0</c:v>
                 </c:pt>
                 <c:pt idx="6">
-                  <c:v>0</c:v>
+                  <c:v>0.0</c:v>
                 </c:pt>
                 <c:pt idx="7">
-                  <c:v>0</c:v>
+                  <c:v>0.0</c:v>
                 </c:pt>
                 <c:pt idx="8">
-                  <c:v>0</c:v>
+                  <c:v>0.0</c:v>
                 </c:pt>
                 <c:pt idx="9">
-                  <c:v>66.666666666666671</c:v>
+                  <c:v>66.66666666666667</c:v>
                 </c:pt>
                 <c:pt idx="10">
-                  <c:v>66.666666666666671</c:v>
+                  <c:v>66.66666666666667</c:v>
                 </c:pt>
                 <c:pt idx="11">
-                  <c:v>66.666666666666671</c:v>
+                  <c:v>66.66666666666667</c:v>
                 </c:pt>
               </c:numCache>
             </c:numRef>
@@ -5115,40 +5115,40 @@
                 <c:formatCode>General</c:formatCode>
                 <c:ptCount val="12"/>
                 <c:pt idx="0">
-                  <c:v>0</c:v>
+                  <c:v>0.0</c:v>
                 </c:pt>
                 <c:pt idx="1">
-                  <c:v>0</c:v>
+                  <c:v>0.0</c:v>
                 </c:pt>
                 <c:pt idx="2">
-                  <c:v>0</c:v>
+                  <c:v>0.0</c:v>
                 </c:pt>
                 <c:pt idx="3">
-                  <c:v>0</c:v>
+                  <c:v>0.0</c:v>
                 </c:pt>
                 <c:pt idx="4">
-                  <c:v>0</c:v>
+                  <c:v>0.0</c:v>
                 </c:pt>
                 <c:pt idx="5">
-                  <c:v>0</c:v>
+                  <c:v>0.0</c:v>
                 </c:pt>
                 <c:pt idx="6">
-                  <c:v>0</c:v>
+                  <c:v>0.0</c:v>
                 </c:pt>
                 <c:pt idx="7">
-                  <c:v>0</c:v>
+                  <c:v>0.0</c:v>
                 </c:pt>
                 <c:pt idx="8">
-                  <c:v>0</c:v>
+                  <c:v>0.0</c:v>
                 </c:pt>
                 <c:pt idx="9">
-                  <c:v>0</c:v>
+                  <c:v>0.0</c:v>
                 </c:pt>
                 <c:pt idx="10">
-                  <c:v>0</c:v>
+                  <c:v>0.0</c:v>
                 </c:pt>
                 <c:pt idx="11">
-                  <c:v>8.3333333333333339</c:v>
+                  <c:v>8.333333333333334</c:v>
                 </c:pt>
               </c:numCache>
             </c:numRef>
@@ -5234,34 +5234,34 @@
                 <c:formatCode>General</c:formatCode>
                 <c:ptCount val="12"/>
                 <c:pt idx="0">
-                  <c:v>0</c:v>
+                  <c:v>0.0</c:v>
                 </c:pt>
                 <c:pt idx="1">
-                  <c:v>0</c:v>
+                  <c:v>0.0</c:v>
                 </c:pt>
                 <c:pt idx="2">
-                  <c:v>0</c:v>
+                  <c:v>0.0</c:v>
                 </c:pt>
                 <c:pt idx="3">
-                  <c:v>0</c:v>
+                  <c:v>0.0</c:v>
                 </c:pt>
                 <c:pt idx="4">
-                  <c:v>0</c:v>
+                  <c:v>0.0</c:v>
                 </c:pt>
                 <c:pt idx="5">
-                  <c:v>0</c:v>
+                  <c:v>0.0</c:v>
                 </c:pt>
                 <c:pt idx="6">
-                  <c:v>0</c:v>
+                  <c:v>0.0</c:v>
                 </c:pt>
                 <c:pt idx="7">
-                  <c:v>0</c:v>
+                  <c:v>0.0</c:v>
                 </c:pt>
                 <c:pt idx="8">
-                  <c:v>0</c:v>
+                  <c:v>0.0</c:v>
                 </c:pt>
                 <c:pt idx="9">
-                  <c:v>25</c:v>
+                  <c:v>25.0</c:v>
                 </c:pt>
                 <c:pt idx="10">
                   <c:v>16.666666666666668</c:v>
@@ -5353,40 +5353,40 @@
                 <c:formatCode>General</c:formatCode>
                 <c:ptCount val="12"/>
                 <c:pt idx="0">
-                  <c:v>0</c:v>
+                  <c:v>0.0</c:v>
                 </c:pt>
                 <c:pt idx="1">
-                  <c:v>0</c:v>
+                  <c:v>0.0</c:v>
                 </c:pt>
                 <c:pt idx="2">
-                  <c:v>0</c:v>
+                  <c:v>0.0</c:v>
                 </c:pt>
                 <c:pt idx="3">
-                  <c:v>0</c:v>
+                  <c:v>0.0</c:v>
                 </c:pt>
                 <c:pt idx="4">
-                  <c:v>0</c:v>
+                  <c:v>0.0</c:v>
                 </c:pt>
                 <c:pt idx="5">
-                  <c:v>0</c:v>
+                  <c:v>0.0</c:v>
                 </c:pt>
                 <c:pt idx="6">
-                  <c:v>0</c:v>
+                  <c:v>0.0</c:v>
                 </c:pt>
                 <c:pt idx="7">
-                  <c:v>0</c:v>
+                  <c:v>0.0</c:v>
                 </c:pt>
                 <c:pt idx="8">
-                  <c:v>0</c:v>
+                  <c:v>0.0</c:v>
                 </c:pt>
                 <c:pt idx="9">
-                  <c:v>0</c:v>
+                  <c:v>0.0</c:v>
                 </c:pt>
                 <c:pt idx="10">
-                  <c:v>8.3333333333333339</c:v>
+                  <c:v>8.333333333333334</c:v>
                 </c:pt>
                 <c:pt idx="11">
-                  <c:v>0</c:v>
+                  <c:v>0.0</c:v>
                 </c:pt>
               </c:numCache>
             </c:numRef>
@@ -5474,40 +5474,40 @@
                 <c:formatCode>General</c:formatCode>
                 <c:ptCount val="12"/>
                 <c:pt idx="0">
-                  <c:v>100</c:v>
+                  <c:v>100.0</c:v>
                 </c:pt>
                 <c:pt idx="1">
-                  <c:v>100</c:v>
+                  <c:v>100.0</c:v>
                 </c:pt>
                 <c:pt idx="2">
-                  <c:v>100</c:v>
+                  <c:v>100.0</c:v>
                 </c:pt>
                 <c:pt idx="3">
-                  <c:v>100</c:v>
+                  <c:v>100.0</c:v>
                 </c:pt>
                 <c:pt idx="4">
-                  <c:v>100</c:v>
+                  <c:v>100.0</c:v>
                 </c:pt>
                 <c:pt idx="5">
-                  <c:v>100</c:v>
+                  <c:v>100.0</c:v>
                 </c:pt>
                 <c:pt idx="6">
-                  <c:v>100</c:v>
+                  <c:v>100.0</c:v>
                 </c:pt>
                 <c:pt idx="7">
-                  <c:v>100</c:v>
+                  <c:v>100.0</c:v>
                 </c:pt>
                 <c:pt idx="8">
-                  <c:v>100</c:v>
+                  <c:v>100.0</c:v>
                 </c:pt>
                 <c:pt idx="9">
-                  <c:v>8.3333333333333339</c:v>
+                  <c:v>8.333333333333334</c:v>
                 </c:pt>
                 <c:pt idx="10">
-                  <c:v>8.3333333333333339</c:v>
+                  <c:v>8.333333333333334</c:v>
                 </c:pt>
                 <c:pt idx="11">
-                  <c:v>8.3333333333333339</c:v>
+                  <c:v>8.333333333333334</c:v>
                 </c:pt>
               </c:numCache>
             </c:numRef>
@@ -9970,7 +9970,7 @@
           <a:p>
             <a:fld id="{C1255C68-584F-174D-BB81-51BF91708794}" type="datetimeFigureOut">
               <a:rPr lang="en-US" smtClean="0"/>
-              <a:t>3/20/26</a:t>
+              <a:t>3/12/26</a:t>
             </a:fld>
             <a:endParaRPr lang="en-US"/>
           </a:p>
@@ -10147,7 +10147,7 @@
           <a:p>
             <a:fld id="{A1EDAAC4-819D-C544-9EA1-C73624CFD70B}" type="datetimeFigureOut">
               <a:rPr lang="en-US" smtClean="0"/>
-              <a:t>3/20/26</a:t>
+              <a:t>3/12/26</a:t>
             </a:fld>
             <a:endParaRPr lang="en-US"/>
           </a:p>
@@ -31445,7 +31445,7 @@
           <a:p>
             <a:r>
               <a:rPr lang="en-US" dirty="0" err="1"/>
-              <a:t>March 20, 2026</a:t>
+              <a:t>March 08, 2026</a:t>
             </a:r>
             <a:endParaRPr lang="en-US" dirty="0"/>
           </a:p>
@@ -31607,7 +31607,7 @@
       </p:sp>
       <p:graphicFrame>
         <p:nvGraphicFramePr>
-          <p:cNvPr id="6" name="Chart 5">
+          <p:cNvPr id="6" name="OBJECTIVES_ARCHITECTURE_CHART">
             <a:extLst>
               <a:ext uri="{FF2B5EF4-FFF2-40B4-BE49-F238E27FC236}">
                 <a16:creationId xmlns:a16="http://schemas.microsoft.com/office/drawing/2014/main" id="{FBB521E4-96ED-814A-B322-AFBA0633E84C}"/>
@@ -31615,7 +31615,13 @@
             </a:extLst>
           </p:cNvPr>
           <p:cNvGraphicFramePr/>
-          <p:nvPr/>
+          <p:nvPr>
+            <p:extLst>
+              <p:ext uri="{D42A27DB-BD31-4B8C-83A1-F6EECF244321}">
+                <p14:modId xmlns:p14="http://schemas.microsoft.com/office/powerpoint/2010/main" val="687656309"/>
+              </p:ext>
+            </p:extLst>
+          </p:nvPr>
         </p:nvGraphicFramePr>
         <p:xfrm>
           <a:off x="478224" y="1606666"/>
@@ -31930,12 +31936,13 @@
               <a:rPr lang="en-US"/>
               <a:t>Progress towards objectives between January 2026 and March 2026</a:t>
             </a:r>
+            <a:endParaRPr lang="en-US"/>
           </a:p>
         </p:txBody>
       </p:sp>
       <p:graphicFrame>
         <p:nvGraphicFramePr>
-          <p:cNvPr id="6" name="Chart 5">
+          <p:cNvPr id="6" name="OBJECTIVES_STATUS_CHART">
             <a:extLst>
               <a:ext uri="{FF2B5EF4-FFF2-40B4-BE49-F238E27FC236}">
                 <a16:creationId xmlns:a16="http://schemas.microsoft.com/office/drawing/2014/main" id="{9A17AFA3-FC96-B65B-0A6A-D4A1754157FE}"/>
@@ -31946,7 +31953,7 @@
           <p:nvPr>
             <p:extLst>
               <p:ext uri="{D42A27DB-BD31-4B8C-83A1-F6EECF244321}">
-                <p14:modId xmlns:p14="http://schemas.microsoft.com/office/powerpoint/2010/main" val="469187844"/>
+                <p14:modId xmlns:p14="http://schemas.microsoft.com/office/powerpoint/2010/main" val="1764705810"/>
               </p:ext>
             </p:extLst>
           </p:nvPr>
@@ -32237,7 +32244,7 @@
           <a:lstStyle/>
           <a:p>
             <a:r>
-              <a:rPr lang="en-US"/>
+              <a:rPr lang="en-US" dirty="0"/>
               <a:t>Progress towards objectives per team between January 2026 and March 2026</a:t>
             </a:r>
           </a:p>
@@ -32245,7 +32252,7 @@
       </p:sp>
       <p:graphicFrame>
         <p:nvGraphicFramePr>
-          <p:cNvPr id="6" name="Chart 5">
+          <p:cNvPr id="6" name="OBJECTIVES_TEAM_CHART">
             <a:extLst>
               <a:ext uri="{FF2B5EF4-FFF2-40B4-BE49-F238E27FC236}">
                 <a16:creationId xmlns:a16="http://schemas.microsoft.com/office/drawing/2014/main" id="{C8EC5A35-9538-D995-065E-528B18F85DED}"/>
@@ -32550,12 +32557,13 @@
               <a:rPr lang="en-US"/>
               <a:t>Progress towards objectives per capability between January 2026 and March 2026</a:t>
             </a:r>
+            <a:endParaRPr lang="en-US"/>
           </a:p>
         </p:txBody>
       </p:sp>
       <p:graphicFrame>
         <p:nvGraphicFramePr>
-          <p:cNvPr id="6" name="Chart 5">
+          <p:cNvPr id="6" name="OBJECTIVES_CAPABILITY_CHART">
             <a:extLst>
               <a:ext uri="{FF2B5EF4-FFF2-40B4-BE49-F238E27FC236}">
                 <a16:creationId xmlns:a16="http://schemas.microsoft.com/office/drawing/2014/main" id="{2774041C-71AE-0495-78BB-3253007E9E90}"/>
@@ -32865,7 +32873,7 @@
       </p:sp>
       <p:graphicFrame>
         <p:nvGraphicFramePr>
-          <p:cNvPr id="6" name="Chart 5">
+          <p:cNvPr id="6" name="OBJECTIVES_OVERALL_CHART">
             <a:extLst>
               <a:ext uri="{FF2B5EF4-FFF2-40B4-BE49-F238E27FC236}">
                 <a16:creationId xmlns:a16="http://schemas.microsoft.com/office/drawing/2014/main" id="{CED42228-B917-5A3E-BB6B-9871F4C489AA}"/>
@@ -33384,7 +33392,7 @@
       </p:sp>
       <p:graphicFrame>
         <p:nvGraphicFramePr>
-          <p:cNvPr id="6" name="Chart 5">
+          <p:cNvPr id="6" name="OBJECTIVES_SECURITY_CHART">
             <a:extLst>
               <a:ext uri="{FF2B5EF4-FFF2-40B4-BE49-F238E27FC236}">
                 <a16:creationId xmlns:a16="http://schemas.microsoft.com/office/drawing/2014/main" id="{EA804B61-8F8C-C6D5-94BB-B5CA583E7BE3}"/>
@@ -33392,7 +33400,13 @@
             </a:extLst>
           </p:cNvPr>
           <p:cNvGraphicFramePr/>
-          <p:nvPr/>
+          <p:nvPr>
+            <p:extLst>
+              <p:ext uri="{D42A27DB-BD31-4B8C-83A1-F6EECF244321}">
+                <p14:modId xmlns:p14="http://schemas.microsoft.com/office/powerpoint/2010/main" val="3697432841"/>
+              </p:ext>
+            </p:extLst>
+          </p:nvPr>
         </p:nvGraphicFramePr>
         <p:xfrm>
           <a:off x="478224" y="1606666"/>
@@ -33688,7 +33702,7 @@
       </p:sp>
       <p:graphicFrame>
         <p:nvGraphicFramePr>
-          <p:cNvPr id="6" name="Chart 5">
+          <p:cNvPr id="6" name="OBJECTIVES_OSH_CHART">
             <a:extLst>
               <a:ext uri="{FF2B5EF4-FFF2-40B4-BE49-F238E27FC236}">
                 <a16:creationId xmlns:a16="http://schemas.microsoft.com/office/drawing/2014/main" id="{1551057A-38E3-B1CD-A98D-FA6566BDC6A6}"/>
@@ -33696,7 +33710,13 @@
             </a:extLst>
           </p:cNvPr>
           <p:cNvGraphicFramePr/>
-          <p:nvPr/>
+          <p:nvPr>
+            <p:extLst>
+              <p:ext uri="{D42A27DB-BD31-4B8C-83A1-F6EECF244321}">
+                <p14:modId xmlns:p14="http://schemas.microsoft.com/office/powerpoint/2010/main" val="4148586428"/>
+              </p:ext>
+            </p:extLst>
+          </p:nvPr>
         </p:nvGraphicFramePr>
         <p:xfrm>
           <a:off x="478224" y="1606666"/>
@@ -33992,7 +34012,7 @@
       </p:sp>
       <p:graphicFrame>
         <p:nvGraphicFramePr>
-          <p:cNvPr id="6" name="Chart 5">
+          <p:cNvPr id="6" name="OBJECTIVES_MAINTAINABILITY_CHART">
             <a:extLst>
               <a:ext uri="{FF2B5EF4-FFF2-40B4-BE49-F238E27FC236}">
                 <a16:creationId xmlns:a16="http://schemas.microsoft.com/office/drawing/2014/main" id="{D309D7A3-6D2B-5238-FDCA-89277EA3E24A}"/>
@@ -34000,7 +34020,13 @@
             </a:extLst>
           </p:cNvPr>
           <p:cNvGraphicFramePr/>
-          <p:nvPr/>
+          <p:nvPr>
+            <p:extLst>
+              <p:ext uri="{D42A27DB-BD31-4B8C-83A1-F6EECF244321}">
+                <p14:modId xmlns:p14="http://schemas.microsoft.com/office/powerpoint/2010/main" val="3629184054"/>
+              </p:ext>
+            </p:extLst>
+          </p:nvPr>
         </p:nvGraphicFramePr>
         <p:xfrm>
           <a:off x="478224" y="1606666"/>
